--- a/slides/britive-agentic-jit.pptx
+++ b/slides/britive-agentic-jit.pptx
@@ -3152,8 +3152,8 @@
         </p:nvSpPr>
         <p:spPr>
           <a:xfrm>
-            <a:off x="640080" y="1417320"/>
-            <a:ext cx="3200400" cy="1371600"/>
+            <a:off x="640080" y="1325880"/>
+            <a:ext cx="3200400" cy="1325880"/>
           </a:xfrm>
           <a:prstGeom prst="roundRect">
             <a:avLst>
@@ -3198,8 +3198,8 @@
         </p:nvSpPr>
         <p:spPr>
           <a:xfrm>
-            <a:off x="841247" y="1600200"/>
-            <a:ext cx="2798064" cy="1005840"/>
+            <a:off x="841247" y="1508760"/>
+            <a:ext cx="2798064" cy="960119"/>
           </a:xfrm>
           <a:prstGeom prst="rect">
             <a:avLst/>
@@ -3240,7 +3240,7 @@
                 </a:solidFill>
                 <a:latin typeface="Segoe UI"/>
               </a:rPr>
-              <a:t>Machine identity, 07:00 daily</a:t>
+              <a:t>Machine identity, 07:00 Mon–Fri</a:t>
             </a:r>
           </a:p>
           <a:p>
@@ -3272,7 +3272,7 @@
                 </a:solidFill>
                 <a:latin typeface="Segoe UI"/>
               </a:rPr>
-              <a:t>No secrets in the repo</a:t>
+              <a:t>Nothing stored in the repo</a:t>
             </a:r>
           </a:p>
         </p:txBody>
@@ -3285,7 +3285,7 @@
         </p:nvSpPr>
         <p:spPr>
           <a:xfrm>
-            <a:off x="3977639" y="2002536"/>
+            <a:off x="3977639" y="1883664"/>
             <a:ext cx="685800" cy="201168"/>
           </a:xfrm>
           <a:prstGeom prst="rightArrow">
@@ -3329,8 +3329,8 @@
         </p:nvSpPr>
         <p:spPr>
           <a:xfrm>
-            <a:off x="4800600" y="1417320"/>
-            <a:ext cx="2743200" cy="1371600"/>
+            <a:off x="4800600" y="1325880"/>
+            <a:ext cx="2743200" cy="1325880"/>
           </a:xfrm>
           <a:prstGeom prst="roundRect">
             <a:avLst>
@@ -3375,8 +3375,8 @@
         </p:nvSpPr>
         <p:spPr>
           <a:xfrm>
-            <a:off x="5001768" y="1600200"/>
-            <a:ext cx="2340864" cy="1005840"/>
+            <a:off x="5001768" y="1508760"/>
+            <a:ext cx="2340864" cy="960119"/>
           </a:xfrm>
           <a:prstGeom prst="rect">
             <a:avLst/>
@@ -3478,7 +3478,7 @@
         </p:nvSpPr>
         <p:spPr>
           <a:xfrm>
-            <a:off x="7726679" y="2002536"/>
+            <a:off x="7726679" y="1883664"/>
             <a:ext cx="685800" cy="201168"/>
           </a:xfrm>
           <a:prstGeom prst="rightArrow">
@@ -3522,8 +3522,8 @@
         </p:nvSpPr>
         <p:spPr>
           <a:xfrm>
-            <a:off x="8732520" y="1417320"/>
-            <a:ext cx="2834640" cy="1371600"/>
+            <a:off x="8732520" y="1325880"/>
+            <a:ext cx="2834640" cy="1325880"/>
           </a:xfrm>
           <a:prstGeom prst="roundRect">
             <a:avLst>
@@ -3568,8 +3568,8 @@
         </p:nvSpPr>
         <p:spPr>
           <a:xfrm>
-            <a:off x="8933688" y="1600200"/>
-            <a:ext cx="2432304" cy="1005840"/>
+            <a:off x="8933688" y="1508760"/>
+            <a:ext cx="2432304" cy="960119"/>
           </a:xfrm>
           <a:prstGeom prst="rect">
             <a:avLst/>
@@ -3649,14 +3649,60 @@
       </p:sp>
       <p:sp>
         <p:nvSpPr>
-          <p:cNvPr id="11" name="TextBox 10"/>
+          <p:cNvPr id="11" name="Rounded Rectangle 10"/>
+          <p:cNvSpPr/>
+          <p:nvPr/>
+        </p:nvSpPr>
+        <p:spPr>
+          <a:xfrm>
+            <a:off x="640080" y="2761488"/>
+            <a:ext cx="10927080" cy="566928"/>
+          </a:xfrm>
+          <a:prstGeom prst="roundRect">
+            <a:avLst>
+              <a:gd name="adj" fmla="val 6000"/>
+            </a:avLst>
+          </a:prstGeom>
+          <a:solidFill>
+            <a:srgbClr val="ECE7F7"/>
+          </a:solidFill>
+          <a:ln w="12700">
+            <a:solidFill>
+              <a:srgbClr val="D2C7EA"/>
+            </a:solidFill>
+          </a:ln>
+          <a:effectLst/>
+        </p:spPr>
+        <p:style>
+          <a:lnRef idx="1">
+            <a:schemeClr val="accent1"/>
+          </a:lnRef>
+          <a:fillRef idx="3">
+            <a:schemeClr val="accent1"/>
+          </a:fillRef>
+          <a:effectRef idx="2">
+            <a:schemeClr val="accent1"/>
+          </a:effectRef>
+          <a:fontRef idx="minor">
+            <a:schemeClr val="lt1"/>
+          </a:fontRef>
+        </p:style>
+        <p:txBody>
+          <a:bodyPr rtlCol="0" anchor="ctr"/>
+          <a:lstStyle/>
+          <a:p/>
+        </p:txBody>
+      </p:sp>
+      <p:sp>
+        <p:nvSpPr>
+          <p:cNvPr id="12" name="TextBox 11"/>
           <p:cNvSpPr txBox="1"/>
           <p:nvPr/>
         </p:nvSpPr>
         <p:spPr>
           <a:xfrm>
-            <a:off x="640080" y="3017520"/>
-            <a:ext cx="10972800" cy="274320"/>
+            <a:off x="960120" y="2761488"/>
+            <a:ext cx="10332720" cy="566928"/>
           </a:xfrm>
           <a:prstGeom prst="rect">
             <a:avLst/>
@@ -3664,10 +3710,26 @@
           <a:noFill/>
         </p:spPr>
         <p:txBody>
-          <a:bodyPr wrap="square" anchor="t" lIns="0" rIns="0" tIns="0" bIns="0">
+          <a:bodyPr wrap="square" anchor="ctr" lIns="0" rIns="0" tIns="0" bIns="0">
             <a:spAutoFit/>
           </a:bodyPr>
           <a:lstStyle/>
+          <a:p>
+            <a:pPr algn="l">
+              <a:spcAft>
+                <a:spcPts val="300"/>
+              </a:spcAft>
+            </a:pPr>
+            <a:r>
+              <a:rPr sz="950" b="1">
+                <a:solidFill>
+                  <a:srgbClr val="6C4BB6"/>
+                </a:solidFill>
+                <a:latin typeface="Segoe UI"/>
+              </a:rPr>
+              <a:t>NO KEYS, NO GITHUB SECRETS — THIS STRING IS THE ENTIRE CREDENTIAL</a:t>
+            </a:r>
+          </a:p>
           <a:p>
             <a:pPr algn="l">
               <a:spcAft>
@@ -3675,6 +3737,45 @@
               </a:spcAft>
             </a:pPr>
             <a:r>
+              <a:rPr sz="1250" b="1">
+                <a:solidFill>
+                  <a:srgbClr val="1F1235"/>
+                </a:solidFill>
+                <a:latin typeface="Consolas"/>
+              </a:rPr>
+              <a:t>sub = repo:ClintPollock/britive-jit-demo:ref:refs/heads/main</a:t>
+            </a:r>
+          </a:p>
+        </p:txBody>
+      </p:sp>
+      <p:sp>
+        <p:nvSpPr>
+          <p:cNvPr id="13" name="TextBox 12"/>
+          <p:cNvSpPr txBox="1"/>
+          <p:nvPr/>
+        </p:nvSpPr>
+        <p:spPr>
+          <a:xfrm>
+            <a:off x="640080" y="3529584"/>
+            <a:ext cx="10972800" cy="274320"/>
+          </a:xfrm>
+          <a:prstGeom prst="rect">
+            <a:avLst/>
+          </a:prstGeom>
+          <a:noFill/>
+        </p:spPr>
+        <p:txBody>
+          <a:bodyPr wrap="square" anchor="t" lIns="0" rIns="0" tIns="0" bIns="0">
+            <a:spAutoFit/>
+          </a:bodyPr>
+          <a:lstStyle/>
+          <a:p>
+            <a:pPr algn="l">
+              <a:spcAft>
+                <a:spcPts val="0"/>
+              </a:spcAft>
+            </a:pPr>
+            <a:r>
               <a:rPr sz="1000" b="1">
                 <a:solidFill>
                   <a:srgbClr val="6C4BB6"/>
@@ -3688,14 +3789,14 @@
       </p:sp>
       <p:sp>
         <p:nvSpPr>
-          <p:cNvPr id="12" name="Rounded Rectangle 11"/>
+          <p:cNvPr id="14" name="Rounded Rectangle 13"/>
           <p:cNvSpPr/>
           <p:nvPr/>
         </p:nvSpPr>
         <p:spPr>
           <a:xfrm>
-            <a:off x="640080" y="3310128"/>
-            <a:ext cx="10927080" cy="2103120"/>
+            <a:off x="640080" y="3803904"/>
+            <a:ext cx="10927080" cy="1993392"/>
           </a:xfrm>
           <a:prstGeom prst="roundRect">
             <a:avLst>
@@ -3734,14 +3835,14 @@
       </p:sp>
       <p:sp>
         <p:nvSpPr>
-          <p:cNvPr id="13" name="TextBox 12"/>
+          <p:cNvPr id="15" name="TextBox 14"/>
           <p:cNvSpPr txBox="1"/>
           <p:nvPr/>
         </p:nvSpPr>
         <p:spPr>
           <a:xfrm>
-            <a:off x="960120" y="3493008"/>
-            <a:ext cx="10332720" cy="1828800"/>
+            <a:off x="960120" y="3950208"/>
+            <a:ext cx="10332720" cy="1737360"/>
           </a:xfrm>
           <a:prstGeom prst="rect">
             <a:avLst/>
@@ -3853,13 +3954,13 @@
       </p:sp>
       <p:sp>
         <p:nvSpPr>
-          <p:cNvPr id="14" name="TextBox 13"/>
+          <p:cNvPr id="16" name="TextBox 15"/>
           <p:cNvSpPr txBox="1"/>
           <p:nvPr/>
         </p:nvSpPr>
         <p:spPr>
           <a:xfrm>
-            <a:off x="640080" y="5650992"/>
+            <a:off x="640080" y="6016752"/>
             <a:ext cx="10972800" cy="365760"/>
           </a:xfrm>
           <a:prstGeom prst="rect">
